--- a/presentations/OPC UA Device Support - Hands-On.pptx
+++ b/presentations/OPC UA Device Support - Hands-On.pptx
@@ -908,7 +908,7 @@
             <a:defRPr cap="all"/>
           </a:pPr>
           <a:r>
-            <a:rPr lang="en-US"/>
+            <a:rPr lang="en-US" cap="none" baseline="0" dirty="0"/>
             <a:t>Any questions left unanswered?</a:t>
           </a:r>
         </a:p>
@@ -947,8 +947,8 @@
             <a:defRPr cap="all"/>
           </a:pPr>
           <a:r>
-            <a:rPr lang="en-US"/>
-            <a:t>You can reach me at  ralph.lange@gmx.de</a:t>
+            <a:rPr lang="en-US" cap="none" baseline="0" dirty="0"/>
+            <a:t>OPC UA room on EPICS Chat</a:t>
           </a:r>
         </a:p>
       </dgm:t>
@@ -1265,7 +1265,7 @@
         </a:bodyPr>
         <a:lstStyle/>
         <a:p>
-          <a:pPr marL="0" lvl="0" indent="0" algn="ctr" defTabSz="977900">
+          <a:pPr marL="0" lvl="0" indent="0" algn="ctr" defTabSz="1111250">
             <a:lnSpc>
               <a:spcPct val="90000"/>
             </a:lnSpc>
@@ -1279,7 +1279,7 @@
             <a:defRPr cap="all"/>
           </a:pPr>
           <a:r>
-            <a:rPr lang="en-US" sz="2200" kern="1200"/>
+            <a:rPr lang="en-US" sz="2500" kern="1200" cap="none" baseline="0" dirty="0"/>
             <a:t>Any questions left unanswered?</a:t>
           </a:r>
         </a:p>
@@ -1417,7 +1417,7 @@
         </a:bodyPr>
         <a:lstStyle/>
         <a:p>
-          <a:pPr marL="0" lvl="0" indent="0" algn="ctr" defTabSz="977900">
+          <a:pPr marL="0" lvl="0" indent="0" algn="ctr" defTabSz="1111250">
             <a:lnSpc>
               <a:spcPct val="90000"/>
             </a:lnSpc>
@@ -1431,8 +1431,8 @@
             <a:defRPr cap="all"/>
           </a:pPr>
           <a:r>
-            <a:rPr lang="en-US" sz="2200" kern="1200"/>
-            <a:t>You can reach me at  ralph.lange@gmx.de</a:t>
+            <a:rPr lang="en-US" sz="2500" kern="1200" cap="none" baseline="0" dirty="0"/>
+            <a:t>OPC UA room on EPICS Chat</a:t>
           </a:r>
         </a:p>
       </dsp:txBody>
@@ -2788,7 +2788,7 @@
           <a:p>
             <a:fld id="{716869FB-2945-4F10-8904-29087F4CE19E}" type="datetimeFigureOut">
               <a:rPr lang="en-US" smtClean="0"/>
-              <a:t>9/13/2024</a:t>
+              <a:t>4/11/2025</a:t>
             </a:fld>
             <a:endParaRPr lang="en-US"/>
           </a:p>
@@ -3241,7 +3241,7 @@
           <a:p>
             <a:fld id="{47C5AB9A-F81E-4440-BDED-9BA4C420D690}" type="datetime1">
               <a:rPr lang="en-US" smtClean="0"/>
-              <a:t>9/13/2024</a:t>
+              <a:t>4/11/2025</a:t>
             </a:fld>
             <a:endParaRPr lang="en-US" dirty="0"/>
           </a:p>
@@ -3511,7 +3511,7 @@
           <a:p>
             <a:fld id="{C4DB84B4-982F-4BFE-B0C4-CFE3DA9F4219}" type="datetime1">
               <a:rPr lang="en-US" smtClean="0"/>
-              <a:t>9/13/2024</a:t>
+              <a:t>4/11/2025</a:t>
             </a:fld>
             <a:endParaRPr lang="en-US" dirty="0"/>
           </a:p>
@@ -3700,7 +3700,7 @@
           <a:p>
             <a:fld id="{F53A0519-9A7C-442D-9F11-88D0D81E1D8E}" type="datetime1">
               <a:rPr lang="en-US" smtClean="0"/>
-              <a:t>9/13/2024</a:t>
+              <a:t>4/11/2025</a:t>
             </a:fld>
             <a:endParaRPr lang="en-US" dirty="0"/>
           </a:p>
@@ -3968,7 +3968,7 @@
           <a:p>
             <a:fld id="{F6F145AF-1098-467F-9087-477835A0A22A}" type="datetime1">
               <a:rPr lang="en-US" smtClean="0"/>
-              <a:t>9/13/2024</a:t>
+              <a:t>4/11/2025</a:t>
             </a:fld>
             <a:endParaRPr lang="en-US" dirty="0"/>
           </a:p>
@@ -4304,7 +4304,7 @@
           <a:p>
             <a:fld id="{3C9526AC-4BE9-4839-8FA1-C95270D80ACC}" type="datetime1">
               <a:rPr lang="en-US" smtClean="0"/>
-              <a:t>9/13/2024</a:t>
+              <a:t>4/11/2025</a:t>
             </a:fld>
             <a:endParaRPr lang="en-US" dirty="0"/>
           </a:p>
@@ -4922,7 +4922,7 @@
           <a:p>
             <a:fld id="{E2F4266C-CD0C-404C-834F-91A150383C31}" type="datetime1">
               <a:rPr lang="en-US" smtClean="0"/>
-              <a:t>9/13/2024</a:t>
+              <a:t>4/11/2025</a:t>
             </a:fld>
             <a:endParaRPr lang="en-US" dirty="0"/>
           </a:p>
@@ -5777,7 +5777,7 @@
           <a:p>
             <a:fld id="{E7C324AD-85E8-41AC-B891-3AE7AE50CCA1}" type="datetime1">
               <a:rPr lang="en-US" smtClean="0"/>
-              <a:t>9/13/2024</a:t>
+              <a:t>4/11/2025</a:t>
             </a:fld>
             <a:endParaRPr lang="en-US" dirty="0"/>
           </a:p>
@@ -5942,7 +5942,7 @@
           <a:p>
             <a:fld id="{659ECC34-14C6-48CB-A350-02E5DD550617}" type="datetime1">
               <a:rPr lang="en-US" smtClean="0"/>
-              <a:t>9/13/2024</a:t>
+              <a:t>4/11/2025</a:t>
             </a:fld>
             <a:endParaRPr lang="en-US" dirty="0"/>
           </a:p>
@@ -6117,7 +6117,7 @@
           <a:p>
             <a:fld id="{CDEE3CAD-2D1D-46E0-9BD6-F824C94E7E06}" type="datetime1">
               <a:rPr lang="en-US" smtClean="0"/>
-              <a:t>9/13/2024</a:t>
+              <a:t>4/11/2025</a:t>
             </a:fld>
             <a:endParaRPr lang="en-US" dirty="0"/>
           </a:p>
@@ -6312,7 +6312,7 @@
           <a:p>
             <a:fld id="{62A27B99-B71A-4FFD-A202-FFEC51F36A60}" type="datetime1">
               <a:rPr lang="en-US" smtClean="0"/>
-              <a:t>9/13/2024</a:t>
+              <a:t>4/11/2025</a:t>
             </a:fld>
             <a:endParaRPr lang="en-US" dirty="0"/>
           </a:p>
@@ -6554,7 +6554,7 @@
           <a:p>
             <a:fld id="{D8496B04-F03C-496C-8BA2-CFE422FCA2D5}" type="datetime1">
               <a:rPr lang="en-US" smtClean="0"/>
-              <a:t>9/13/2024</a:t>
+              <a:t>4/11/2025</a:t>
             </a:fld>
             <a:endParaRPr lang="en-US" dirty="0"/>
           </a:p>
@@ -6869,7 +6869,7 @@
           <a:p>
             <a:fld id="{F8993AB8-E15D-4E49-8BF1-48EF9F4FF5DA}" type="datetime1">
               <a:rPr lang="en-US" smtClean="0"/>
-              <a:t>9/13/2024</a:t>
+              <a:t>4/11/2025</a:t>
             </a:fld>
             <a:endParaRPr lang="en-US" dirty="0"/>
           </a:p>
@@ -7308,7 +7308,7 @@
           <a:p>
             <a:fld id="{C5AADFC3-4799-4ADF-B29D-80CB1C0A5516}" type="datetime1">
               <a:rPr lang="en-US" smtClean="0"/>
-              <a:t>9/13/2024</a:t>
+              <a:t>4/11/2025</a:t>
             </a:fld>
             <a:endParaRPr lang="en-US" dirty="0"/>
           </a:p>
@@ -7421,7 +7421,7 @@
           <a:p>
             <a:fld id="{D84CE6CB-3FD5-4F5B-93CB-CE17FE34C423}" type="datetime1">
               <a:rPr lang="en-US" smtClean="0"/>
-              <a:t>9/13/2024</a:t>
+              <a:t>4/11/2025</a:t>
             </a:fld>
             <a:endParaRPr lang="en-US" dirty="0"/>
           </a:p>
@@ -7511,7 +7511,7 @@
           <a:p>
             <a:fld id="{B2CB2BC3-4582-43E9-A259-AAE1AA3F94D5}" type="datetime1">
               <a:rPr lang="en-US" smtClean="0"/>
-              <a:t>9/13/2024</a:t>
+              <a:t>4/11/2025</a:t>
             </a:fld>
             <a:endParaRPr lang="en-US" dirty="0"/>
           </a:p>
@@ -7785,7 +7785,7 @@
           <a:p>
             <a:fld id="{0AE86A0D-78F0-4F86-A69A-FCDE376979B3}" type="datetime1">
               <a:rPr lang="en-US" smtClean="0"/>
-              <a:t>9/13/2024</a:t>
+              <a:t>4/11/2025</a:t>
             </a:fld>
             <a:endParaRPr lang="en-US" dirty="0"/>
           </a:p>
@@ -8055,7 +8055,7 @@
           <a:p>
             <a:fld id="{8AA90D7B-3DAD-4D19-AE7F-6EB3EF74D3BB}" type="datetime1">
               <a:rPr lang="en-US" smtClean="0"/>
-              <a:t>9/13/2024</a:t>
+              <a:t>4/11/2025</a:t>
             </a:fld>
             <a:endParaRPr lang="en-US" dirty="0"/>
           </a:p>
@@ -8477,7 +8477,7 @@
           <a:p>
             <a:fld id="{E7239603-A030-4CC3-9DA2-96785DC6FE3A}" type="datetime1">
               <a:rPr lang="en-US" smtClean="0"/>
-              <a:t>9/13/2024</a:t>
+              <a:t>4/11/2025</a:t>
             </a:fld>
             <a:endParaRPr lang="en-US" dirty="0"/>
           </a:p>
@@ -12121,7 +12121,7 @@
             <p:ph idx="1"/>
             <p:extLst>
               <p:ext uri="{D42A27DB-BD31-4B8C-83A1-F6EECF244321}">
-                <p14:modId xmlns:p14="http://schemas.microsoft.com/office/powerpoint/2010/main" val="3309715902"/>
+                <p14:modId xmlns:p14="http://schemas.microsoft.com/office/powerpoint/2010/main" val="4192053461"/>
               </p:ext>
             </p:extLst>
           </p:nvPr>
@@ -12183,11 +12183,7 @@
           <a:p>
             <a:r>
               <a:rPr lang="en-US" dirty="0"/>
-              <a:t>OPC UA </a:t>
-            </a:r>
-            <a:r>
-              <a:rPr lang="en-US"/>
-              <a:t>Integration Workflow</a:t>
+              <a:t>Manual Integration Workflow</a:t>
             </a:r>
             <a:br>
               <a:rPr lang="en-US" dirty="0"/>
@@ -12444,7 +12440,7 @@
           <a:p>
             <a:r>
               <a:rPr lang="en-US" dirty="0"/>
-              <a:t>OPC UA Integration Workflow</a:t>
+              <a:t>Manual Integration Workflow</a:t>
             </a:r>
             <a:br>
               <a:rPr lang="en-US" dirty="0"/>
@@ -12760,7 +12756,7 @@
           <a:p>
             <a:r>
               <a:rPr lang="en-US" dirty="0"/>
-              <a:t>OPC UA Integration Workflow</a:t>
+              <a:t>Manual Integration Workflow</a:t>
             </a:r>
             <a:br>
               <a:rPr lang="en-US" dirty="0"/>
